--- a/Presentations/GeneticAlgorithms.pptx
+++ b/Presentations/GeneticAlgorithms.pptx
@@ -5,7 +5,7 @@
     <p:sldMasterId id="2147483648" r:id="rId1"/>
   </p:sldMasterIdLst>
   <p:notesMasterIdLst>
-    <p:notesMasterId r:id="rId13"/>
+    <p:notesMasterId r:id="rId15"/>
   </p:notesMasterIdLst>
   <p:sldIdLst>
     <p:sldId id="256" r:id="rId2"/>
@@ -18,7 +18,9 @@
     <p:sldId id="430" r:id="rId9"/>
     <p:sldId id="469" r:id="rId10"/>
     <p:sldId id="470" r:id="rId11"/>
-    <p:sldId id="269" r:id="rId12"/>
+    <p:sldId id="471" r:id="rId12"/>
+    <p:sldId id="472" r:id="rId13"/>
+    <p:sldId id="269" r:id="rId14"/>
   </p:sldIdLst>
   <p:sldSz cx="12192000" cy="6858000"/>
   <p:notesSz cx="9144000" cy="6858000"/>
@@ -3654,6 +3656,189 @@
             <a:spLocks noGrp="1"/>
           </p:cNvSpPr>
           <p:nvPr>
+            <p:ph type="title"/>
+          </p:nvPr>
+        </p:nvSpPr>
+        <p:spPr/>
+        <p:txBody>
+          <a:bodyPr>
+            <a:normAutofit/>
+          </a:bodyPr>
+          <a:lstStyle/>
+          <a:p>
+            <a:r>
+              <a:rPr lang="en-US" dirty="0"/>
+              <a:t>Genetic Algorithms – Chromosome and Gene</a:t>
+            </a:r>
+          </a:p>
+        </p:txBody>
+      </p:sp>
+      <p:sp>
+        <p:nvSpPr>
+          <p:cNvPr id="3" name="Content Placeholder 2"/>
+          <p:cNvSpPr>
+            <a:spLocks noGrp="1"/>
+          </p:cNvSpPr>
+          <p:nvPr>
+            <p:ph idx="1"/>
+          </p:nvPr>
+        </p:nvSpPr>
+        <p:spPr/>
+        <p:txBody>
+          <a:bodyPr>
+            <a:normAutofit/>
+          </a:bodyPr>
+          <a:lstStyle/>
+          <a:p>
+            <a:r>
+              <a:rPr lang="en-US" dirty="0"/>
+              <a:t>Chromosome – One complete candidate solution</a:t>
+            </a:r>
+          </a:p>
+          <a:p>
+            <a:r>
+              <a:rPr lang="en-US" dirty="0"/>
+              <a:t>Example:</a:t>
+            </a:r>
+          </a:p>
+          <a:p>
+            <a:pPr marL="400050" lvl="1" indent="0">
+              <a:buNone/>
+            </a:pPr>
+            <a:r>
+              <a:rPr lang="en-US" dirty="0">
+                <a:solidFill>
+                  <a:schemeClr val="accent6">
+                    <a:lumMod val="50000"/>
+                  </a:schemeClr>
+                </a:solidFill>
+              </a:rPr>
+              <a:t>Chromosome – 10110</a:t>
+            </a:r>
+          </a:p>
+          <a:p>
+            <a:r>
+              <a:rPr lang="en-US" dirty="0"/>
+              <a:t>Each position represents a gene.</a:t>
+            </a:r>
+          </a:p>
+          <a:p>
+            <a:r>
+              <a:rPr lang="en-US" dirty="0"/>
+              <a:t>Genes are the components of a chromosome.</a:t>
+            </a:r>
+          </a:p>
+          <a:p>
+            <a:r>
+              <a:rPr lang="en-US" dirty="0"/>
+              <a:t>The meaning of a gene depends on the chosen representation.</a:t>
+            </a:r>
+          </a:p>
+        </p:txBody>
+      </p:sp>
+    </p:spTree>
+    <p:extLst>
+      <p:ext uri="{BB962C8B-B14F-4D97-AF65-F5344CB8AC3E}">
+        <p14:creationId xmlns:p14="http://schemas.microsoft.com/office/powerpoint/2010/main" val="1642554506"/>
+      </p:ext>
+    </p:extLst>
+  </p:cSld>
+  <p:clrMapOvr>
+    <a:masterClrMapping/>
+  </p:clrMapOvr>
+</p:sld>
+</file>
+
+<file path=ppt/slides/slide12.xml><?xml version="1.0" encoding="utf-8"?>
+<p:sld xmlns:a="http://schemas.openxmlformats.org/drawingml/2006/main" xmlns:r="http://schemas.openxmlformats.org/officeDocument/2006/relationships" xmlns:p="http://schemas.openxmlformats.org/presentationml/2006/main">
+  <p:cSld>
+    <p:spTree>
+      <p:nvGrpSpPr>
+        <p:cNvPr id="1" name=""/>
+        <p:cNvGrpSpPr/>
+        <p:nvPr/>
+      </p:nvGrpSpPr>
+      <p:grpSpPr>
+        <a:xfrm>
+          <a:off x="0" y="0"/>
+          <a:ext cx="0" cy="0"/>
+          <a:chOff x="0" y="0"/>
+          <a:chExt cx="0" cy="0"/>
+        </a:xfrm>
+      </p:grpSpPr>
+      <p:pic>
+        <p:nvPicPr>
+          <p:cNvPr id="5" name="Picture 4">
+            <a:extLst>
+              <a:ext uri="{FF2B5EF4-FFF2-40B4-BE49-F238E27FC236}">
+                <a16:creationId xmlns:a16="http://schemas.microsoft.com/office/drawing/2014/main" id="{8435FB95-949C-DE0D-D7B5-5FDE4F65BE9C}"/>
+              </a:ext>
+            </a:extLst>
+          </p:cNvPr>
+          <p:cNvPicPr>
+            <a:picLocks noChangeAspect="1"/>
+          </p:cNvPicPr>
+          <p:nvPr/>
+        </p:nvPicPr>
+        <p:blipFill>
+          <a:blip r:embed="rId2">
+            <a:extLst>
+              <a:ext uri="{28A0092B-C50C-407E-A947-70E740481C1C}">
+                <a14:useLocalDpi xmlns:a14="http://schemas.microsoft.com/office/drawing/2010/main" val="0"/>
+              </a:ext>
+            </a:extLst>
+          </a:blip>
+          <a:stretch>
+            <a:fillRect/>
+          </a:stretch>
+        </p:blipFill>
+        <p:spPr>
+          <a:xfrm>
+            <a:off x="3239" y="0"/>
+            <a:ext cx="12185522" cy="6858000"/>
+          </a:xfrm>
+          <a:prstGeom prst="rect">
+            <a:avLst/>
+          </a:prstGeom>
+        </p:spPr>
+      </p:pic>
+    </p:spTree>
+    <p:extLst>
+      <p:ext uri="{BB962C8B-B14F-4D97-AF65-F5344CB8AC3E}">
+        <p14:creationId xmlns:p14="http://schemas.microsoft.com/office/powerpoint/2010/main" val="1640612838"/>
+      </p:ext>
+    </p:extLst>
+  </p:cSld>
+  <p:clrMapOvr>
+    <a:masterClrMapping/>
+  </p:clrMapOvr>
+</p:sld>
+</file>
+
+<file path=ppt/slides/slide13.xml><?xml version="1.0" encoding="utf-8"?>
+<p:sld xmlns:a="http://schemas.openxmlformats.org/drawingml/2006/main" xmlns:r="http://schemas.openxmlformats.org/officeDocument/2006/relationships" xmlns:p="http://schemas.openxmlformats.org/presentationml/2006/main">
+  <p:cSld>
+    <p:spTree>
+      <p:nvGrpSpPr>
+        <p:cNvPr id="1" name=""/>
+        <p:cNvGrpSpPr/>
+        <p:nvPr/>
+      </p:nvGrpSpPr>
+      <p:grpSpPr>
+        <a:xfrm>
+          <a:off x="0" y="0"/>
+          <a:ext cx="0" cy="0"/>
+          <a:chOff x="0" y="0"/>
+          <a:chExt cx="0" cy="0"/>
+        </a:xfrm>
+      </p:grpSpPr>
+      <p:sp>
+        <p:nvSpPr>
+          <p:cNvPr id="2" name="Title 1"/>
+          <p:cNvSpPr>
+            <a:spLocks noGrp="1"/>
+          </p:cNvSpPr>
+          <p:nvPr>
             <p:ph type="ctrTitle"/>
           </p:nvPr>
         </p:nvSpPr>
@@ -4368,8 +4553,8 @@
             <a:r>
               <a:rPr lang="en-US" dirty="0">
                 <a:solidFill>
-                  <a:schemeClr val="accent3">
-                    <a:lumMod val="75000"/>
+                  <a:schemeClr val="accent6">
+                    <a:lumMod val="50000"/>
                   </a:schemeClr>
                 </a:solidFill>
               </a:rPr>
@@ -4383,8 +4568,8 @@
             <a:r>
               <a:rPr lang="en-US" dirty="0">
                 <a:solidFill>
-                  <a:schemeClr val="accent3">
-                    <a:lumMod val="75000"/>
+                  <a:schemeClr val="accent6">
+                    <a:lumMod val="50000"/>
                   </a:schemeClr>
                 </a:solidFill>
               </a:rPr>
@@ -4398,8 +4583,8 @@
             <a:r>
               <a:rPr lang="en-US" dirty="0">
                 <a:solidFill>
-                  <a:schemeClr val="accent3">
-                    <a:lumMod val="75000"/>
+                  <a:schemeClr val="accent6">
+                    <a:lumMod val="50000"/>
                   </a:schemeClr>
                 </a:solidFill>
               </a:rPr>
@@ -4413,8 +4598,8 @@
             <a:r>
               <a:rPr lang="en-US" dirty="0">
                 <a:solidFill>
-                  <a:schemeClr val="accent3">
-                    <a:lumMod val="75000"/>
+                  <a:schemeClr val="accent6">
+                    <a:lumMod val="50000"/>
                   </a:schemeClr>
                 </a:solidFill>
               </a:rPr>
@@ -4428,8 +4613,8 @@
             <a:r>
               <a:rPr lang="en-US" dirty="0">
                 <a:solidFill>
-                  <a:schemeClr val="accent3">
-                    <a:lumMod val="75000"/>
+                  <a:schemeClr val="accent6">
+                    <a:lumMod val="50000"/>
                   </a:schemeClr>
                 </a:solidFill>
               </a:rPr>
@@ -4437,8 +4622,8 @@
             </a:r>
             <a:endParaRPr lang="en-IN" dirty="0">
               <a:solidFill>
-                <a:schemeClr val="accent3">
-                  <a:lumMod val="75000"/>
+                <a:schemeClr val="accent6">
+                  <a:lumMod val="50000"/>
                 </a:schemeClr>
               </a:solidFill>
             </a:endParaRPr>
